--- a/deckstyle/assets/template.pptx
+++ b/deckstyle/assets/template.pptx
@@ -634,9 +634,17 @@
             </a:avLst>
           </a:prstGeom>
           <a:solidFill>
-            <a:srgbClr val="FFFFFF"/>
-          </a:solidFill>
-          <a:ln/>
+            <a:srgbClr val="FFFFFF">
+              <a:alpha val="16000"/>
+            </a:srgbClr>
+          </a:solidFill>
+          <a:ln w="19050">
+            <a:solidFill>
+              <a:srgbClr val="FFFFFF">
+                <a:alpha val="55000"/>
+              </a:srgbClr>
+            </a:solidFill>
+          </a:ln>
         </p:spPr>
       </p:sp>
     </p:spTree>
@@ -686,8 +694,8 @@
         </p:nvSpPr>
         <p:spPr>
           <a:xfrm>
-            <a:off x="508000" y="1524000"/>
-            <a:ext cx="5461000" cy="3810000"/>
+            <a:off x="508000" y="762000"/>
+            <a:ext cx="5461000" cy="5334000"/>
           </a:xfrm>
           <a:prstGeom prst="roundRect">
             <a:avLst>
@@ -710,8 +718,8 @@
         </p:nvSpPr>
         <p:spPr>
           <a:xfrm>
-            <a:off x="6223000" y="1524000"/>
-            <a:ext cx="5461000" cy="3810000"/>
+            <a:off x="6223000" y="762000"/>
+            <a:ext cx="5461000" cy="5334000"/>
           </a:xfrm>
           <a:prstGeom prst="roundRect">
             <a:avLst>

--- a/deckstyle/assets/template.pptx
+++ b/deckstyle/assets/template.pptx
@@ -562,8 +562,8 @@
         </p:nvSpPr>
         <p:spPr>
           <a:xfrm>
-            <a:off x="508000" y="406400"/>
-            <a:ext cx="11176000" cy="6045200"/>
+            <a:off x="508000" y="508000"/>
+            <a:ext cx="11176000" cy="5842000"/>
           </a:xfrm>
           <a:prstGeom prst="roundRect">
             <a:avLst>
@@ -625,8 +625,8 @@
         </p:nvSpPr>
         <p:spPr>
           <a:xfrm>
-            <a:off x="508000" y="406400"/>
-            <a:ext cx="11176000" cy="6045200"/>
+            <a:off x="508000" y="508000"/>
+            <a:ext cx="11176000" cy="5842000"/>
           </a:xfrm>
           <a:prstGeom prst="roundRect">
             <a:avLst>
@@ -634,14 +634,14 @@
             </a:avLst>
           </a:prstGeom>
           <a:solidFill>
-            <a:srgbClr val="FFFFFF">
-              <a:alpha val="16000"/>
+            <a:srgbClr val="0E2740">
+              <a:alpha val="94000"/>
             </a:srgbClr>
           </a:solidFill>
           <a:ln w="19050">
             <a:solidFill>
               <a:srgbClr val="FFFFFF">
-                <a:alpha val="55000"/>
+                <a:alpha val="45000"/>
               </a:srgbClr>
             </a:solidFill>
           </a:ln>
@@ -694,8 +694,8 @@
         </p:nvSpPr>
         <p:spPr>
           <a:xfrm>
-            <a:off x="508000" y="762000"/>
-            <a:ext cx="5461000" cy="5334000"/>
+            <a:off x="508000" y="1016000"/>
+            <a:ext cx="5461000" cy="4826000"/>
           </a:xfrm>
           <a:prstGeom prst="roundRect">
             <a:avLst>
@@ -718,8 +718,8 @@
         </p:nvSpPr>
         <p:spPr>
           <a:xfrm>
-            <a:off x="6223000" y="762000"/>
-            <a:ext cx="5461000" cy="5334000"/>
+            <a:off x="6223000" y="1016000"/>
+            <a:ext cx="5461000" cy="4826000"/>
           </a:xfrm>
           <a:prstGeom prst="roundRect">
             <a:avLst>
